--- a/livro_ia_educacao/saida/pptx/Cap10_slides.pptx
+++ b/livro_ia_educacao/saida/pptx/Cap10_slides.pptx
@@ -10626,11 +10626,11 @@
         <p:spPr>
           <a:xfrm>
             <a:off x="548640" y="1417320"/>
-            <a:ext cx="11064240" cy="762000"/>
+            <a:ext cx="11064240" cy="682752"/>
           </a:xfrm>
           <a:prstGeom prst="roundRect">
             <a:avLst>
-              <a:gd name="adj" fmla="val 14400"/>
+              <a:gd name="adj" fmla="val 16071"/>
             </a:avLst>
           </a:prstGeom>
           <a:solidFill>
@@ -10657,7 +10657,7 @@
         <p:spPr>
           <a:xfrm>
             <a:off x="731520" y="1417320"/>
-            <a:ext cx="548640" cy="762000"/>
+            <a:ext cx="548640" cy="682752"/>
           </a:xfrm>
           <a:prstGeom prst="rect">
             <a:avLst/>
@@ -10693,7 +10693,7 @@
         <p:spPr>
           <a:xfrm>
             <a:off x="1463040" y="1417320"/>
-            <a:ext cx="9966960" cy="762000"/>
+            <a:ext cx="9966960" cy="682752"/>
           </a:xfrm>
           <a:prstGeom prst="rect">
             <a:avLst/>
@@ -10728,12 +10728,12 @@
         </p:nvSpPr>
         <p:spPr>
           <a:xfrm>
-            <a:off x="548640" y="2289048"/>
-            <a:ext cx="11064240" cy="762000"/>
+            <a:off x="548640" y="2209800"/>
+            <a:ext cx="11064240" cy="682752"/>
           </a:xfrm>
           <a:prstGeom prst="roundRect">
             <a:avLst>
-              <a:gd name="adj" fmla="val 14400"/>
+              <a:gd name="adj" fmla="val 16071"/>
             </a:avLst>
           </a:prstGeom>
           <a:solidFill>
@@ -10759,8 +10759,8 @@
         </p:nvSpPr>
         <p:spPr>
           <a:xfrm>
-            <a:off x="731520" y="2289048"/>
-            <a:ext cx="548640" cy="762000"/>
+            <a:off x="731520" y="2209800"/>
+            <a:ext cx="548640" cy="682752"/>
           </a:xfrm>
           <a:prstGeom prst="rect">
             <a:avLst/>
@@ -10795,8 +10795,8 @@
         </p:nvSpPr>
         <p:spPr>
           <a:xfrm>
-            <a:off x="1463040" y="2289048"/>
-            <a:ext cx="9966960" cy="762000"/>
+            <a:off x="1463040" y="2209800"/>
+            <a:ext cx="9966960" cy="682752"/>
           </a:xfrm>
           <a:prstGeom prst="rect">
             <a:avLst/>
@@ -10831,12 +10831,12 @@
         </p:nvSpPr>
         <p:spPr>
           <a:xfrm>
-            <a:off x="548640" y="3160776"/>
-            <a:ext cx="11064240" cy="762000"/>
+            <a:off x="548640" y="3002280"/>
+            <a:ext cx="11064240" cy="682752"/>
           </a:xfrm>
           <a:prstGeom prst="roundRect">
             <a:avLst>
-              <a:gd name="adj" fmla="val 14400"/>
+              <a:gd name="adj" fmla="val 16071"/>
             </a:avLst>
           </a:prstGeom>
           <a:solidFill>
@@ -10862,8 +10862,8 @@
         </p:nvSpPr>
         <p:spPr>
           <a:xfrm>
-            <a:off x="731520" y="3160776"/>
-            <a:ext cx="548640" cy="762000"/>
+            <a:off x="731520" y="3002280"/>
+            <a:ext cx="548640" cy="682752"/>
           </a:xfrm>
           <a:prstGeom prst="rect">
             <a:avLst/>
@@ -10898,8 +10898,8 @@
         </p:nvSpPr>
         <p:spPr>
           <a:xfrm>
-            <a:off x="1463040" y="3160776"/>
-            <a:ext cx="9966960" cy="762000"/>
+            <a:off x="1463040" y="3002280"/>
+            <a:ext cx="9966960" cy="682752"/>
           </a:xfrm>
           <a:prstGeom prst="rect">
             <a:avLst/>
@@ -10934,12 +10934,12 @@
         </p:nvSpPr>
         <p:spPr>
           <a:xfrm>
-            <a:off x="548640" y="4032504"/>
-            <a:ext cx="11064240" cy="762000"/>
+            <a:off x="548640" y="3794760"/>
+            <a:ext cx="11064240" cy="682752"/>
           </a:xfrm>
           <a:prstGeom prst="roundRect">
             <a:avLst>
-              <a:gd name="adj" fmla="val 14400"/>
+              <a:gd name="adj" fmla="val 16071"/>
             </a:avLst>
           </a:prstGeom>
           <a:solidFill>
@@ -10965,8 +10965,8 @@
         </p:nvSpPr>
         <p:spPr>
           <a:xfrm>
-            <a:off x="731520" y="4032504"/>
-            <a:ext cx="548640" cy="762000"/>
+            <a:off x="731520" y="3794760"/>
+            <a:ext cx="548640" cy="682752"/>
           </a:xfrm>
           <a:prstGeom prst="rect">
             <a:avLst/>
@@ -11001,8 +11001,8 @@
         </p:nvSpPr>
         <p:spPr>
           <a:xfrm>
-            <a:off x="1463040" y="4032504"/>
-            <a:ext cx="9966960" cy="762000"/>
+            <a:off x="1463040" y="3794760"/>
+            <a:ext cx="9966960" cy="682752"/>
           </a:xfrm>
           <a:prstGeom prst="rect">
             <a:avLst/>
@@ -11037,12 +11037,12 @@
         </p:nvSpPr>
         <p:spPr>
           <a:xfrm>
-            <a:off x="548640" y="4904232"/>
-            <a:ext cx="11064240" cy="762000"/>
+            <a:off x="548640" y="4587240"/>
+            <a:ext cx="11064240" cy="682752"/>
           </a:xfrm>
           <a:prstGeom prst="roundRect">
             <a:avLst>
-              <a:gd name="adj" fmla="val 14400"/>
+              <a:gd name="adj" fmla="val 16071"/>
             </a:avLst>
           </a:prstGeom>
           <a:solidFill>
@@ -11068,8 +11068,8 @@
         </p:nvSpPr>
         <p:spPr>
           <a:xfrm>
-            <a:off x="731520" y="4904232"/>
-            <a:ext cx="548640" cy="762000"/>
+            <a:off x="731520" y="4587240"/>
+            <a:ext cx="548640" cy="682752"/>
           </a:xfrm>
           <a:prstGeom prst="rect">
             <a:avLst/>
@@ -11104,8 +11104,8 @@
         </p:nvSpPr>
         <p:spPr>
           <a:xfrm>
-            <a:off x="1463040" y="4904232"/>
-            <a:ext cx="9966960" cy="762000"/>
+            <a:off x="1463040" y="4587240"/>
+            <a:ext cx="9966960" cy="682752"/>
           </a:xfrm>
           <a:prstGeom prst="rect">
             <a:avLst/>
@@ -11140,12 +11140,12 @@
         </p:nvSpPr>
         <p:spPr>
           <a:xfrm>
-            <a:off x="548640" y="5775960"/>
-            <a:ext cx="11064240" cy="762000"/>
+            <a:off x="548640" y="5379720"/>
+            <a:ext cx="11064240" cy="682752"/>
           </a:xfrm>
           <a:prstGeom prst="roundRect">
             <a:avLst>
-              <a:gd name="adj" fmla="val 14400"/>
+              <a:gd name="adj" fmla="val 16071"/>
             </a:avLst>
           </a:prstGeom>
           <a:solidFill>
@@ -11171,8 +11171,8 @@
         </p:nvSpPr>
         <p:spPr>
           <a:xfrm>
-            <a:off x="731520" y="5775960"/>
-            <a:ext cx="548640" cy="762000"/>
+            <a:off x="731520" y="5379720"/>
+            <a:ext cx="548640" cy="682752"/>
           </a:xfrm>
           <a:prstGeom prst="rect">
             <a:avLst/>
@@ -11207,8 +11207,8 @@
         </p:nvSpPr>
         <p:spPr>
           <a:xfrm>
-            <a:off x="1463040" y="5775960"/>
-            <a:ext cx="9966960" cy="762000"/>
+            <a:off x="1463040" y="5379720"/>
+            <a:ext cx="9966960" cy="682752"/>
           </a:xfrm>
           <a:prstGeom prst="rect">
             <a:avLst/>
